--- a/skills/daida-ai/assets/templates/casual.pptx
+++ b/skills/daida-ai/assets/templates/casual.pptx
@@ -2570,9 +2570,12 @@
 <p:sldMaster xmlns:a="http://schemas.openxmlformats.org/drawingml/2006/main" xmlns:r="http://schemas.openxmlformats.org/officeDocument/2006/relationships" xmlns:p="http://schemas.openxmlformats.org/presentationml/2006/main">
   <p:cSld>
     <p:bg>
-      <p:bgRef idx="1001">
-        <a:schemeClr val="bg1"/>
-      </p:bgRef>
+      <p:bgPr>
+        <a:solidFill>
+          <a:srgbClr val="FFF8F0"/>
+        </a:solidFill>
+        <a:effectLst/>
+      </p:bgPr>
     </p:bg>
     <p:spTree>
       <p:nvGrpSpPr>
@@ -3077,52 +3080,52 @@
 </file>
 
 <file path=ppt/theme/theme1.xml><?xml version="1.0" encoding="utf-8"?>
-<a:theme xmlns:a="http://schemas.openxmlformats.org/drawingml/2006/main" name="Office Theme">
+<a:theme xmlns:a="http://schemas.openxmlformats.org/drawingml/2006/main" name="Casual Warm">
   <a:themeElements>
-    <a:clrScheme name="Office">
+    <a:clrScheme name="Casual">
       <a:dk1>
-        <a:sysClr val="windowText" lastClr="000000"/>
+        <a:srgbClr val="333333"/>
       </a:dk1>
       <a:lt1>
-        <a:sysClr val="window" lastClr="FFFFFF"/>
+        <a:srgbClr val="FFF8F0"/>
       </a:lt1>
       <a:dk2>
-        <a:srgbClr val="1F497D"/>
+        <a:srgbClr val="555555"/>
       </a:dk2>
       <a:lt2>
-        <a:srgbClr val="EEECE1"/>
+        <a:srgbClr val="FFF0E0"/>
       </a:lt2>
       <a:accent1>
-        <a:srgbClr val="4F81BD"/>
+        <a:srgbClr val="FF6B35"/>
       </a:accent1>
       <a:accent2>
-        <a:srgbClr val="C0504D"/>
+        <a:srgbClr val="F7C948"/>
       </a:accent2>
       <a:accent3>
-        <a:srgbClr val="9BBB59"/>
+        <a:srgbClr val="06D6A0"/>
       </a:accent3>
       <a:accent4>
-        <a:srgbClr val="8064A2"/>
+        <a:srgbClr val="118AB2"/>
       </a:accent4>
       <a:accent5>
-        <a:srgbClr val="4BACC6"/>
+        <a:srgbClr val="EF476F"/>
       </a:accent5>
       <a:accent6>
-        <a:srgbClr val="F79646"/>
+        <a:srgbClr val="8338EC"/>
       </a:accent6>
       <a:hlink>
-        <a:srgbClr val="0000FF"/>
+        <a:srgbClr val="118AB2"/>
       </a:hlink>
       <a:folHlink>
-        <a:srgbClr val="800080"/>
+        <a:srgbClr val="8338EC"/>
       </a:folHlink>
     </a:clrScheme>
     <a:fontScheme name="Office">
       <a:majorFont>
-        <a:latin typeface="Calibri"/>
+        <a:latin typeface="Fredoka"/>
         <a:ea typeface=""/>
         <a:cs typeface=""/>
-        <a:font script="Jpan" typeface="ＭＳ Ｐゴシック"/>
+        <a:font script="Jpan" typeface="M PLUS Rounded 1c"/>
         <a:font script="Hang" typeface="맑은 고딕"/>
         <a:font script="Hans" typeface="宋体"/>
         <a:font script="Hant" typeface="新細明體"/>
@@ -3154,10 +3157,10 @@
         <a:font script="Geor" typeface="Sylfaen"/>
       </a:majorFont>
       <a:minorFont>
-        <a:latin typeface="Calibri"/>
+        <a:latin typeface="Nunito"/>
         <a:ea typeface=""/>
         <a:cs typeface=""/>
-        <a:font script="Jpan" typeface="ＭＳ Ｐゴシック"/>
+        <a:font script="Jpan" typeface="M PLUS Rounded 1c"/>
         <a:font script="Hang" typeface="맑은 고딕"/>
         <a:font script="Hans" typeface="宋体"/>
         <a:font script="Hant" typeface="新細明體"/>

--- a/skills/daida-ai/assets/templates/casual.pptx
+++ b/skills/daida-ai/assets/templates/casual.pptx
@@ -135,7 +135,7 @@
         <p:spPr>
           <a:xfrm>
             <a:off x="685800" y="2130425"/>
-            <a:ext cx="7772400" cy="1470025"/>
+            <a:ext cx="10820095" cy="1470025"/>
           </a:xfrm>
         </p:spPr>
         <p:txBody>
@@ -163,7 +163,7 @@
         <p:spPr>
           <a:xfrm>
             <a:off x="1371600" y="3886200"/>
-            <a:ext cx="6400800" cy="1752600"/>
+            <a:ext cx="9448495" cy="1752600"/>
           </a:xfrm>
         </p:spPr>
         <p:txBody>
@@ -546,7 +546,7 @@
         </p:nvSpPr>
         <p:spPr>
           <a:xfrm>
-            <a:off x="6629400" y="274638"/>
+            <a:off x="9677095" y="274638"/>
             <a:ext cx="2057400" cy="5851525"/>
           </a:xfrm>
         </p:spPr>
@@ -575,7 +575,7 @@
         <p:spPr>
           <a:xfrm>
             <a:off x="457200" y="274638"/>
-            <a:ext cx="6019800" cy="5851525"/>
+            <a:ext cx="9067495" cy="5851525"/>
           </a:xfrm>
         </p:spPr>
         <p:txBody>
@@ -897,7 +897,7 @@
         <p:spPr>
           <a:xfrm>
             <a:off x="722313" y="4406900"/>
-            <a:ext cx="7772400" cy="1362075"/>
+            <a:ext cx="10747069" cy="1362075"/>
           </a:xfrm>
         </p:spPr>
         <p:txBody>
@@ -929,7 +929,7 @@
         <p:spPr>
           <a:xfrm>
             <a:off x="722313" y="2906713"/>
-            <a:ext cx="7772400" cy="1500187"/>
+            <a:ext cx="10747069" cy="1500187"/>
           </a:xfrm>
         </p:spPr>
         <p:txBody>
@@ -1166,7 +1166,7 @@
         <p:spPr>
           <a:xfrm>
             <a:off x="457200" y="1600200"/>
-            <a:ext cx="4038600" cy="4525963"/>
+            <a:ext cx="5562447" cy="4525963"/>
           </a:xfrm>
         </p:spPr>
         <p:txBody>
@@ -1250,8 +1250,8 @@
         </p:nvSpPr>
         <p:spPr>
           <a:xfrm>
-            <a:off x="4648200" y="1600200"/>
-            <a:ext cx="4038600" cy="4525963"/>
+            <a:off x="6172047" y="1600200"/>
+            <a:ext cx="5562447" cy="4525963"/>
           </a:xfrm>
         </p:spPr>
         <p:txBody>
@@ -1458,7 +1458,7 @@
         <p:spPr>
           <a:xfrm>
             <a:off x="457200" y="1535113"/>
-            <a:ext cx="4040188" cy="639762"/>
+            <a:ext cx="5562447" cy="639762"/>
           </a:xfrm>
         </p:spPr>
         <p:txBody>
@@ -1523,7 +1523,7 @@
         <p:spPr>
           <a:xfrm>
             <a:off x="457200" y="2174875"/>
-            <a:ext cx="4040188" cy="3951288"/>
+            <a:ext cx="5562447" cy="3951288"/>
           </a:xfrm>
         </p:spPr>
         <p:txBody>
@@ -1607,8 +1607,8 @@
         </p:nvSpPr>
         <p:spPr>
           <a:xfrm>
-            <a:off x="4645025" y="1535113"/>
-            <a:ext cx="4041775" cy="639762"/>
+            <a:off x="6172047" y="1535113"/>
+            <a:ext cx="5562447" cy="639762"/>
           </a:xfrm>
         </p:spPr>
         <p:txBody>
@@ -1672,8 +1672,8 @@
         </p:nvSpPr>
         <p:spPr>
           <a:xfrm>
-            <a:off x="4645025" y="2174875"/>
-            <a:ext cx="4041775" cy="3951288"/>
+            <a:off x="6172047" y="2174875"/>
+            <a:ext cx="5562447" cy="3951288"/>
           </a:xfrm>
         </p:spPr>
         <p:txBody>
@@ -2066,7 +2066,7 @@
         <p:spPr>
           <a:xfrm>
             <a:off x="457200" y="273050"/>
-            <a:ext cx="3008313" cy="1162050"/>
+            <a:ext cx="3425898" cy="1162050"/>
           </a:xfrm>
         </p:spPr>
         <p:txBody>
@@ -2097,8 +2097,8 @@
         </p:nvSpPr>
         <p:spPr>
           <a:xfrm>
-            <a:off x="3575050" y="273050"/>
-            <a:ext cx="5111750" cy="5853113"/>
+            <a:off x="3883098" y="273050"/>
+            <a:ext cx="7851397" cy="5853113"/>
           </a:xfrm>
         </p:spPr>
         <p:txBody>
@@ -2183,7 +2183,7 @@
         <p:spPr>
           <a:xfrm>
             <a:off x="457200" y="1435100"/>
-            <a:ext cx="3008313" cy="4691063"/>
+            <a:ext cx="3425898" cy="4691063"/>
           </a:xfrm>
         </p:spPr>
         <p:txBody>
@@ -2342,8 +2342,8 @@
         </p:nvSpPr>
         <p:spPr>
           <a:xfrm>
-            <a:off x="1792288" y="4800600"/>
-            <a:ext cx="5486400" cy="566738"/>
+            <a:off x="1828800" y="4800600"/>
+            <a:ext cx="8534095" cy="566738"/>
           </a:xfrm>
         </p:spPr>
         <p:txBody>
@@ -2374,8 +2374,8 @@
         </p:nvSpPr>
         <p:spPr>
           <a:xfrm>
-            <a:off x="1792288" y="612775"/>
-            <a:ext cx="5486400" cy="4114800"/>
+            <a:off x="1828800" y="612775"/>
+            <a:ext cx="8534095" cy="4114800"/>
           </a:xfrm>
         </p:spPr>
         <p:txBody>
@@ -2435,8 +2435,8 @@
         </p:nvSpPr>
         <p:spPr>
           <a:xfrm>
-            <a:off x="1792288" y="5367338"/>
-            <a:ext cx="5486400" cy="804862"/>
+            <a:off x="1828800" y="5367338"/>
+            <a:ext cx="8534095" cy="804862"/>
           </a:xfrm>
         </p:spPr>
         <p:txBody>
@@ -2570,12 +2570,9 @@
 <p:sldMaster xmlns:a="http://schemas.openxmlformats.org/drawingml/2006/main" xmlns:r="http://schemas.openxmlformats.org/officeDocument/2006/relationships" xmlns:p="http://schemas.openxmlformats.org/presentationml/2006/main">
   <p:cSld>
     <p:bg>
-      <p:bgPr>
-        <a:solidFill>
-          <a:srgbClr val="FFF8F0"/>
-        </a:solidFill>
-        <a:effectLst/>
-      </p:bgPr>
+      <p:bgRef idx="1001">
+        <a:schemeClr val="bg1"/>
+      </p:bgRef>
     </p:bg>
     <p:spTree>
       <p:nvGrpSpPr>
@@ -2604,7 +2601,7 @@
         <p:spPr>
           <a:xfrm>
             <a:off x="457200" y="274638"/>
-            <a:ext cx="8229600" cy="1143000"/>
+            <a:ext cx="11277295" cy="1143000"/>
           </a:xfrm>
           <a:prstGeom prst="rect">
             <a:avLst/>
@@ -2637,7 +2634,7 @@
         <p:spPr>
           <a:xfrm>
             <a:off x="457200" y="1600200"/>
-            <a:ext cx="8229600" cy="4525963"/>
+            <a:ext cx="11277295" cy="4525963"/>
           </a:xfrm>
           <a:prstGeom prst="rect">
             <a:avLst/>
@@ -2699,7 +2696,7 @@
         <p:spPr>
           <a:xfrm>
             <a:off x="457200" y="6356350"/>
-            <a:ext cx="2133600" cy="365125"/>
+            <a:ext cx="3425898" cy="365125"/>
           </a:xfrm>
           <a:prstGeom prst="rect">
             <a:avLst/>
@@ -2739,8 +2736,8 @@
         </p:nvSpPr>
         <p:spPr>
           <a:xfrm>
-            <a:off x="3124200" y="6356350"/>
-            <a:ext cx="2895600" cy="365125"/>
+            <a:off x="3883098" y="6356350"/>
+            <a:ext cx="3425898" cy="365125"/>
           </a:xfrm>
           <a:prstGeom prst="rect">
             <a:avLst/>
@@ -2776,8 +2773,8 @@
         </p:nvSpPr>
         <p:spPr>
           <a:xfrm>
-            <a:off x="6553200" y="6356350"/>
-            <a:ext cx="2133600" cy="365125"/>
+            <a:off x="7308996" y="6356350"/>
+            <a:ext cx="3425898" cy="365125"/>
           </a:xfrm>
           <a:prstGeom prst="rect">
             <a:avLst/>
@@ -2804,6 +2801,72 @@
             <a:endParaRPr lang="en-US"/>
           </a:p>
         </p:txBody>
+      </p:sp>
+      <p:sp>
+        <p:nvSpPr>
+          <p:cNvPr id="101" name="Bottom Strip"/>
+          <p:cNvSpPr/>
+          <p:nvPr/>
+        </p:nvSpPr>
+        <p:spPr>
+          <a:xfrm>
+            <a:off x="0" y="6515100"/>
+            <a:ext cx="12191695" cy="342900"/>
+          </a:xfrm>
+          <a:prstGeom prst="rect">
+            <a:avLst/>
+          </a:prstGeom>
+          <a:solidFill>
+            <a:schemeClr val="accent1"/>
+          </a:solidFill>
+          <a:ln>
+            <a:noFill/>
+          </a:ln>
+        </p:spPr>
+      </p:sp>
+      <p:sp>
+        <p:nvSpPr>
+          <p:cNvPr id="102" name="Accent Circle 1"/>
+          <p:cNvSpPr/>
+          <p:nvPr/>
+        </p:nvSpPr>
+        <p:spPr>
+          <a:xfrm>
+            <a:off x="11291695" y="6158000"/>
+            <a:ext cx="250000" cy="250000"/>
+          </a:xfrm>
+          <a:prstGeom prst="ellipse">
+            <a:avLst/>
+          </a:prstGeom>
+          <a:solidFill>
+            <a:schemeClr val="accent2"/>
+          </a:solidFill>
+          <a:ln>
+            <a:noFill/>
+          </a:ln>
+        </p:spPr>
+      </p:sp>
+      <p:sp>
+        <p:nvSpPr>
+          <p:cNvPr id="103" name="Accent Circle 2"/>
+          <p:cNvSpPr/>
+          <p:nvPr/>
+        </p:nvSpPr>
+        <p:spPr>
+          <a:xfrm>
+            <a:off x="11591695" y="6308000"/>
+            <a:ext cx="200000" cy="200000"/>
+          </a:xfrm>
+          <a:prstGeom prst="ellipse">
+            <a:avLst/>
+          </a:prstGeom>
+          <a:solidFill>
+            <a:schemeClr val="accent3"/>
+          </a:solidFill>
+          <a:ln>
+            <a:noFill/>
+          </a:ln>
+        </p:spPr>
       </p:sp>
     </p:spTree>
     <p:extLst>

--- a/skills/daida-ai/assets/templates/casual.pptx
+++ b/skills/daida-ai/assets/templates/casual.pptx
@@ -2590,220 +2590,6 @@
       </p:grpSpPr>
       <p:sp>
         <p:nvSpPr>
-          <p:cNvPr id="2" name="Title Placeholder 1"/>
-          <p:cNvSpPr>
-            <a:spLocks noGrp="1"/>
-          </p:cNvSpPr>
-          <p:nvPr>
-            <p:ph type="title"/>
-          </p:nvPr>
-        </p:nvSpPr>
-        <p:spPr>
-          <a:xfrm>
-            <a:off x="457200" y="274638"/>
-            <a:ext cx="11277295" cy="1143000"/>
-          </a:xfrm>
-          <a:prstGeom prst="rect">
-            <a:avLst/>
-          </a:prstGeom>
-        </p:spPr>
-        <p:txBody>
-          <a:bodyPr vert="horz" lIns="91440" tIns="45720" rIns="91440" bIns="45720" rtlCol="0" anchor="ctr">
-            <a:normAutofit/>
-          </a:bodyPr>
-          <a:lstStyle/>
-          <a:p>
-            <a:r>
-              <a:rPr lang="en-US" smtClean="0"/>
-              <a:t>Click to edit Master title style</a:t>
-            </a:r>
-            <a:endParaRPr lang="en-US"/>
-          </a:p>
-        </p:txBody>
-      </p:sp>
-      <p:sp>
-        <p:nvSpPr>
-          <p:cNvPr id="3" name="Text Placeholder 2"/>
-          <p:cNvSpPr>
-            <a:spLocks noGrp="1"/>
-          </p:cNvSpPr>
-          <p:nvPr>
-            <p:ph type="body" idx="1"/>
-          </p:nvPr>
-        </p:nvSpPr>
-        <p:spPr>
-          <a:xfrm>
-            <a:off x="457200" y="1600200"/>
-            <a:ext cx="11277295" cy="4525963"/>
-          </a:xfrm>
-          <a:prstGeom prst="rect">
-            <a:avLst/>
-          </a:prstGeom>
-        </p:spPr>
-        <p:txBody>
-          <a:bodyPr vert="horz" lIns="91440" tIns="45720" rIns="91440" bIns="45720" rtlCol="0">
-            <a:normAutofit/>
-          </a:bodyPr>
-          <a:lstStyle/>
-          <a:p>
-            <a:pPr lvl="0"/>
-            <a:r>
-              <a:rPr lang="en-US" smtClean="0"/>
-              <a:t>Click to edit Master text styles</a:t>
-            </a:r>
-          </a:p>
-          <a:p>
-            <a:pPr lvl="1"/>
-            <a:r>
-              <a:rPr lang="en-US" smtClean="0"/>
-              <a:t>Second level</a:t>
-            </a:r>
-          </a:p>
-          <a:p>
-            <a:pPr lvl="2"/>
-            <a:r>
-              <a:rPr lang="en-US" smtClean="0"/>
-              <a:t>Third level</a:t>
-            </a:r>
-          </a:p>
-          <a:p>
-            <a:pPr lvl="3"/>
-            <a:r>
-              <a:rPr lang="en-US" smtClean="0"/>
-              <a:t>Fourth level</a:t>
-            </a:r>
-          </a:p>
-          <a:p>
-            <a:pPr lvl="4"/>
-            <a:r>
-              <a:rPr lang="en-US" smtClean="0"/>
-              <a:t>Fifth level</a:t>
-            </a:r>
-            <a:endParaRPr lang="en-US"/>
-          </a:p>
-        </p:txBody>
-      </p:sp>
-      <p:sp>
-        <p:nvSpPr>
-          <p:cNvPr id="4" name="Date Placeholder 3"/>
-          <p:cNvSpPr>
-            <a:spLocks noGrp="1"/>
-          </p:cNvSpPr>
-          <p:nvPr>
-            <p:ph type="dt" sz="half" idx="2"/>
-          </p:nvPr>
-        </p:nvSpPr>
-        <p:spPr>
-          <a:xfrm>
-            <a:off x="457200" y="6356350"/>
-            <a:ext cx="3425898" cy="365125"/>
-          </a:xfrm>
-          <a:prstGeom prst="rect">
-            <a:avLst/>
-          </a:prstGeom>
-        </p:spPr>
-        <p:txBody>
-          <a:bodyPr vert="horz" lIns="91440" tIns="45720" rIns="91440" bIns="45720" rtlCol="0" anchor="ctr"/>
-          <a:lstStyle>
-            <a:lvl1pPr algn="l">
-              <a:defRPr sz="1200">
-                <a:solidFill>
-                  <a:schemeClr val="tx1">
-                    <a:tint val="75000"/>
-                  </a:schemeClr>
-                </a:solidFill>
-              </a:defRPr>
-            </a:lvl1pPr>
-          </a:lstStyle>
-          <a:p>
-            <a:fld id="{5BCAD085-E8A6-8845-BD4E-CB4CCA059FC4}" type="datetimeFigureOut">
-              <a:rPr lang="en-US" smtClean="0"/>
-              <a:t>1/27/13</a:t>
-            </a:fld>
-            <a:endParaRPr lang="en-US"/>
-          </a:p>
-        </p:txBody>
-      </p:sp>
-      <p:sp>
-        <p:nvSpPr>
-          <p:cNvPr id="5" name="Footer Placeholder 4"/>
-          <p:cNvSpPr>
-            <a:spLocks noGrp="1"/>
-          </p:cNvSpPr>
-          <p:nvPr>
-            <p:ph type="ftr" sz="quarter" idx="3"/>
-          </p:nvPr>
-        </p:nvSpPr>
-        <p:spPr>
-          <a:xfrm>
-            <a:off x="3883098" y="6356350"/>
-            <a:ext cx="3425898" cy="365125"/>
-          </a:xfrm>
-          <a:prstGeom prst="rect">
-            <a:avLst/>
-          </a:prstGeom>
-        </p:spPr>
-        <p:txBody>
-          <a:bodyPr vert="horz" lIns="91440" tIns="45720" rIns="91440" bIns="45720" rtlCol="0" anchor="ctr"/>
-          <a:lstStyle>
-            <a:lvl1pPr algn="ctr">
-              <a:defRPr sz="1200">
-                <a:solidFill>
-                  <a:schemeClr val="tx1">
-                    <a:tint val="75000"/>
-                  </a:schemeClr>
-                </a:solidFill>
-              </a:defRPr>
-            </a:lvl1pPr>
-          </a:lstStyle>
-          <a:p>
-            <a:endParaRPr lang="en-US"/>
-          </a:p>
-        </p:txBody>
-      </p:sp>
-      <p:sp>
-        <p:nvSpPr>
-          <p:cNvPr id="6" name="Slide Number Placeholder 5"/>
-          <p:cNvSpPr>
-            <a:spLocks noGrp="1"/>
-          </p:cNvSpPr>
-          <p:nvPr>
-            <p:ph type="sldNum" sz="quarter" idx="4"/>
-          </p:nvPr>
-        </p:nvSpPr>
-        <p:spPr>
-          <a:xfrm>
-            <a:off x="7308996" y="6356350"/>
-            <a:ext cx="3425898" cy="365125"/>
-          </a:xfrm>
-          <a:prstGeom prst="rect">
-            <a:avLst/>
-          </a:prstGeom>
-        </p:spPr>
-        <p:txBody>
-          <a:bodyPr vert="horz" lIns="91440" tIns="45720" rIns="91440" bIns="45720" rtlCol="0" anchor="ctr"/>
-          <a:lstStyle>
-            <a:lvl1pPr algn="r">
-              <a:defRPr sz="1200">
-                <a:solidFill>
-                  <a:schemeClr val="tx1">
-                    <a:tint val="75000"/>
-                  </a:schemeClr>
-                </a:solidFill>
-              </a:defRPr>
-            </a:lvl1pPr>
-          </a:lstStyle>
-          <a:p>
-            <a:fld id="{C1FF6DA9-008F-8B48-92A6-B652298478BF}" type="slidenum">
-              <a:rPr lang="en-US" smtClean="0"/>
-              <a:t>‹#›</a:t>
-            </a:fld>
-            <a:endParaRPr lang="en-US"/>
-          </a:p>
-        </p:txBody>
-      </p:sp>
-      <p:sp>
-        <p:nvSpPr>
           <p:cNvPr id="101" name="Bottom Strip"/>
           <p:cNvSpPr/>
           <p:nvPr/>
@@ -2867,6 +2653,220 @@
             <a:noFill/>
           </a:ln>
         </p:spPr>
+      </p:sp>
+      <p:sp>
+        <p:nvSpPr>
+          <p:cNvPr id="2" name="Title Placeholder 1"/>
+          <p:cNvSpPr>
+            <a:spLocks noGrp="1"/>
+          </p:cNvSpPr>
+          <p:nvPr>
+            <p:ph type="title"/>
+          </p:nvPr>
+        </p:nvSpPr>
+        <p:spPr>
+          <a:xfrm>
+            <a:off x="457200" y="274638"/>
+            <a:ext cx="11277295" cy="1143000"/>
+          </a:xfrm>
+          <a:prstGeom prst="rect">
+            <a:avLst/>
+          </a:prstGeom>
+        </p:spPr>
+        <p:txBody>
+          <a:bodyPr vert="horz" lIns="91440" tIns="45720" rIns="91440" bIns="45720" rtlCol="0" anchor="ctr">
+            <a:normAutofit/>
+          </a:bodyPr>
+          <a:lstStyle/>
+          <a:p>
+            <a:r>
+              <a:rPr lang="en-US" smtClean="0"/>
+              <a:t>Click to edit Master title style</a:t>
+            </a:r>
+            <a:endParaRPr lang="en-US"/>
+          </a:p>
+        </p:txBody>
+      </p:sp>
+      <p:sp>
+        <p:nvSpPr>
+          <p:cNvPr id="3" name="Text Placeholder 2"/>
+          <p:cNvSpPr>
+            <a:spLocks noGrp="1"/>
+          </p:cNvSpPr>
+          <p:nvPr>
+            <p:ph type="body" idx="1"/>
+          </p:nvPr>
+        </p:nvSpPr>
+        <p:spPr>
+          <a:xfrm>
+            <a:off x="457200" y="1600200"/>
+            <a:ext cx="11277295" cy="4525963"/>
+          </a:xfrm>
+          <a:prstGeom prst="rect">
+            <a:avLst/>
+          </a:prstGeom>
+        </p:spPr>
+        <p:txBody>
+          <a:bodyPr vert="horz" lIns="91440" tIns="45720" rIns="91440" bIns="45720" rtlCol="0">
+            <a:normAutofit/>
+          </a:bodyPr>
+          <a:lstStyle/>
+          <a:p>
+            <a:pPr lvl="0"/>
+            <a:r>
+              <a:rPr lang="en-US" smtClean="0"/>
+              <a:t>Click to edit Master text styles</a:t>
+            </a:r>
+          </a:p>
+          <a:p>
+            <a:pPr lvl="1"/>
+            <a:r>
+              <a:rPr lang="en-US" smtClean="0"/>
+              <a:t>Second level</a:t>
+            </a:r>
+          </a:p>
+          <a:p>
+            <a:pPr lvl="2"/>
+            <a:r>
+              <a:rPr lang="en-US" smtClean="0"/>
+              <a:t>Third level</a:t>
+            </a:r>
+          </a:p>
+          <a:p>
+            <a:pPr lvl="3"/>
+            <a:r>
+              <a:rPr lang="en-US" smtClean="0"/>
+              <a:t>Fourth level</a:t>
+            </a:r>
+          </a:p>
+          <a:p>
+            <a:pPr lvl="4"/>
+            <a:r>
+              <a:rPr lang="en-US" smtClean="0"/>
+              <a:t>Fifth level</a:t>
+            </a:r>
+            <a:endParaRPr lang="en-US"/>
+          </a:p>
+        </p:txBody>
+      </p:sp>
+      <p:sp>
+        <p:nvSpPr>
+          <p:cNvPr id="4" name="Date Placeholder 3"/>
+          <p:cNvSpPr>
+            <a:spLocks noGrp="1"/>
+          </p:cNvSpPr>
+          <p:nvPr>
+            <p:ph type="dt" sz="half" idx="2"/>
+          </p:nvPr>
+        </p:nvSpPr>
+        <p:spPr>
+          <a:xfrm>
+            <a:off x="457200" y="6356350"/>
+            <a:ext cx="3425898" cy="365125"/>
+          </a:xfrm>
+          <a:prstGeom prst="rect">
+            <a:avLst/>
+          </a:prstGeom>
+        </p:spPr>
+        <p:txBody>
+          <a:bodyPr vert="horz" lIns="91440" tIns="45720" rIns="91440" bIns="45720" rtlCol="0" anchor="ctr"/>
+          <a:lstStyle>
+            <a:lvl1pPr algn="l">
+              <a:defRPr sz="1200">
+                <a:solidFill>
+                  <a:schemeClr val="tx1">
+                    <a:tint val="75000"/>
+                  </a:schemeClr>
+                </a:solidFill>
+              </a:defRPr>
+            </a:lvl1pPr>
+          </a:lstStyle>
+          <a:p>
+            <a:fld id="{5BCAD085-E8A6-8845-BD4E-CB4CCA059FC4}" type="datetimeFigureOut">
+              <a:rPr lang="en-US" smtClean="0"/>
+              <a:t>1/27/13</a:t>
+            </a:fld>
+            <a:endParaRPr lang="en-US"/>
+          </a:p>
+        </p:txBody>
+      </p:sp>
+      <p:sp>
+        <p:nvSpPr>
+          <p:cNvPr id="5" name="Footer Placeholder 4"/>
+          <p:cNvSpPr>
+            <a:spLocks noGrp="1"/>
+          </p:cNvSpPr>
+          <p:nvPr>
+            <p:ph type="ftr" sz="quarter" idx="3"/>
+          </p:nvPr>
+        </p:nvSpPr>
+        <p:spPr>
+          <a:xfrm>
+            <a:off x="3883098" y="6356350"/>
+            <a:ext cx="3425898" cy="365125"/>
+          </a:xfrm>
+          <a:prstGeom prst="rect">
+            <a:avLst/>
+          </a:prstGeom>
+        </p:spPr>
+        <p:txBody>
+          <a:bodyPr vert="horz" lIns="91440" tIns="45720" rIns="91440" bIns="45720" rtlCol="0" anchor="ctr"/>
+          <a:lstStyle>
+            <a:lvl1pPr algn="ctr">
+              <a:defRPr sz="1200">
+                <a:solidFill>
+                  <a:schemeClr val="tx1">
+                    <a:tint val="75000"/>
+                  </a:schemeClr>
+                </a:solidFill>
+              </a:defRPr>
+            </a:lvl1pPr>
+          </a:lstStyle>
+          <a:p>
+            <a:endParaRPr lang="en-US"/>
+          </a:p>
+        </p:txBody>
+      </p:sp>
+      <p:sp>
+        <p:nvSpPr>
+          <p:cNvPr id="6" name="Slide Number Placeholder 5"/>
+          <p:cNvSpPr>
+            <a:spLocks noGrp="1"/>
+          </p:cNvSpPr>
+          <p:nvPr>
+            <p:ph type="sldNum" sz="quarter" idx="4"/>
+          </p:nvPr>
+        </p:nvSpPr>
+        <p:spPr>
+          <a:xfrm>
+            <a:off x="7308996" y="6356350"/>
+            <a:ext cx="3425898" cy="365125"/>
+          </a:xfrm>
+          <a:prstGeom prst="rect">
+            <a:avLst/>
+          </a:prstGeom>
+        </p:spPr>
+        <p:txBody>
+          <a:bodyPr vert="horz" lIns="91440" tIns="45720" rIns="91440" bIns="45720" rtlCol="0" anchor="ctr"/>
+          <a:lstStyle>
+            <a:lvl1pPr algn="r">
+              <a:defRPr sz="1200">
+                <a:solidFill>
+                  <a:schemeClr val="tx1">
+                    <a:tint val="75000"/>
+                  </a:schemeClr>
+                </a:solidFill>
+              </a:defRPr>
+            </a:lvl1pPr>
+          </a:lstStyle>
+          <a:p>
+            <a:fld id="{C1FF6DA9-008F-8B48-92A6-B652298478BF}" type="slidenum">
+              <a:rPr lang="en-US" smtClean="0"/>
+              <a:t>‹#›</a:t>
+            </a:fld>
+            <a:endParaRPr lang="en-US"/>
+          </a:p>
+        </p:txBody>
       </p:sp>
     </p:spTree>
     <p:extLst>

--- a/skills/daida-ai/assets/templates/casual.pptx
+++ b/skills/daida-ai/assets/templates/casual.pptx
@@ -135,7 +135,7 @@
         <p:spPr>
           <a:xfrm>
             <a:off x="685800" y="2130425"/>
-            <a:ext cx="7772400" cy="1470025"/>
+            <a:ext cx="10820095" cy="1470025"/>
           </a:xfrm>
         </p:spPr>
         <p:txBody>
@@ -163,7 +163,7 @@
         <p:spPr>
           <a:xfrm>
             <a:off x="1371600" y="3886200"/>
-            <a:ext cx="6400800" cy="1752600"/>
+            <a:ext cx="9448495" cy="1752600"/>
           </a:xfrm>
         </p:spPr>
         <p:txBody>
@@ -546,7 +546,7 @@
         </p:nvSpPr>
         <p:spPr>
           <a:xfrm>
-            <a:off x="6629400" y="274638"/>
+            <a:off x="9677095" y="274638"/>
             <a:ext cx="2057400" cy="5851525"/>
           </a:xfrm>
         </p:spPr>
@@ -575,7 +575,7 @@
         <p:spPr>
           <a:xfrm>
             <a:off x="457200" y="274638"/>
-            <a:ext cx="6019800" cy="5851525"/>
+            <a:ext cx="9067495" cy="5851525"/>
           </a:xfrm>
         </p:spPr>
         <p:txBody>
@@ -897,7 +897,7 @@
         <p:spPr>
           <a:xfrm>
             <a:off x="722313" y="4406900"/>
-            <a:ext cx="7772400" cy="1362075"/>
+            <a:ext cx="10747069" cy="1362075"/>
           </a:xfrm>
         </p:spPr>
         <p:txBody>
@@ -929,7 +929,7 @@
         <p:spPr>
           <a:xfrm>
             <a:off x="722313" y="2906713"/>
-            <a:ext cx="7772400" cy="1500187"/>
+            <a:ext cx="10747069" cy="1500187"/>
           </a:xfrm>
         </p:spPr>
         <p:txBody>
@@ -1166,7 +1166,7 @@
         <p:spPr>
           <a:xfrm>
             <a:off x="457200" y="1600200"/>
-            <a:ext cx="4038600" cy="4525963"/>
+            <a:ext cx="5562447" cy="4525963"/>
           </a:xfrm>
         </p:spPr>
         <p:txBody>
@@ -1250,8 +1250,8 @@
         </p:nvSpPr>
         <p:spPr>
           <a:xfrm>
-            <a:off x="4648200" y="1600200"/>
-            <a:ext cx="4038600" cy="4525963"/>
+            <a:off x="6172047" y="1600200"/>
+            <a:ext cx="5562447" cy="4525963"/>
           </a:xfrm>
         </p:spPr>
         <p:txBody>
@@ -1458,7 +1458,7 @@
         <p:spPr>
           <a:xfrm>
             <a:off x="457200" y="1535113"/>
-            <a:ext cx="4040188" cy="639762"/>
+            <a:ext cx="5562447" cy="639762"/>
           </a:xfrm>
         </p:spPr>
         <p:txBody>
@@ -1523,7 +1523,7 @@
         <p:spPr>
           <a:xfrm>
             <a:off x="457200" y="2174875"/>
-            <a:ext cx="4040188" cy="3951288"/>
+            <a:ext cx="5562447" cy="3951288"/>
           </a:xfrm>
         </p:spPr>
         <p:txBody>
@@ -1607,8 +1607,8 @@
         </p:nvSpPr>
         <p:spPr>
           <a:xfrm>
-            <a:off x="4645025" y="1535113"/>
-            <a:ext cx="4041775" cy="639762"/>
+            <a:off x="6172047" y="1535113"/>
+            <a:ext cx="5562447" cy="639762"/>
           </a:xfrm>
         </p:spPr>
         <p:txBody>
@@ -1672,8 +1672,8 @@
         </p:nvSpPr>
         <p:spPr>
           <a:xfrm>
-            <a:off x="4645025" y="2174875"/>
-            <a:ext cx="4041775" cy="3951288"/>
+            <a:off x="6172047" y="2174875"/>
+            <a:ext cx="5562447" cy="3951288"/>
           </a:xfrm>
         </p:spPr>
         <p:txBody>
@@ -2066,7 +2066,7 @@
         <p:spPr>
           <a:xfrm>
             <a:off x="457200" y="273050"/>
-            <a:ext cx="3008313" cy="1162050"/>
+            <a:ext cx="3425898" cy="1162050"/>
           </a:xfrm>
         </p:spPr>
         <p:txBody>
@@ -2097,8 +2097,8 @@
         </p:nvSpPr>
         <p:spPr>
           <a:xfrm>
-            <a:off x="3575050" y="273050"/>
-            <a:ext cx="5111750" cy="5853113"/>
+            <a:off x="3883098" y="273050"/>
+            <a:ext cx="7851397" cy="5853113"/>
           </a:xfrm>
         </p:spPr>
         <p:txBody>
@@ -2183,7 +2183,7 @@
         <p:spPr>
           <a:xfrm>
             <a:off x="457200" y="1435100"/>
-            <a:ext cx="3008313" cy="4691063"/>
+            <a:ext cx="3425898" cy="4691063"/>
           </a:xfrm>
         </p:spPr>
         <p:txBody>
@@ -2342,8 +2342,8 @@
         </p:nvSpPr>
         <p:spPr>
           <a:xfrm>
-            <a:off x="1792288" y="4800600"/>
-            <a:ext cx="5486400" cy="566738"/>
+            <a:off x="1828800" y="4800600"/>
+            <a:ext cx="8534095" cy="566738"/>
           </a:xfrm>
         </p:spPr>
         <p:txBody>
@@ -2374,8 +2374,8 @@
         </p:nvSpPr>
         <p:spPr>
           <a:xfrm>
-            <a:off x="1792288" y="612775"/>
-            <a:ext cx="5486400" cy="4114800"/>
+            <a:off x="1828800" y="612775"/>
+            <a:ext cx="8534095" cy="4114800"/>
           </a:xfrm>
         </p:spPr>
         <p:txBody>
@@ -2435,8 +2435,8 @@
         </p:nvSpPr>
         <p:spPr>
           <a:xfrm>
-            <a:off x="1792288" y="5367338"/>
-            <a:ext cx="5486400" cy="804862"/>
+            <a:off x="1828800" y="5367338"/>
+            <a:ext cx="8534095" cy="804862"/>
           </a:xfrm>
         </p:spPr>
         <p:txBody>
@@ -2570,12 +2570,9 @@
 <p:sldMaster xmlns:a="http://schemas.openxmlformats.org/drawingml/2006/main" xmlns:r="http://schemas.openxmlformats.org/officeDocument/2006/relationships" xmlns:p="http://schemas.openxmlformats.org/presentationml/2006/main">
   <p:cSld>
     <p:bg>
-      <p:bgPr>
-        <a:solidFill>
-          <a:srgbClr val="FFF8F0"/>
-        </a:solidFill>
-        <a:effectLst/>
-      </p:bgPr>
+      <p:bgRef idx="1001">
+        <a:schemeClr val="bg1"/>
+      </p:bgRef>
     </p:bg>
     <p:spTree>
       <p:nvGrpSpPr>
@@ -2593,6 +2590,72 @@
       </p:grpSpPr>
       <p:sp>
         <p:nvSpPr>
+          <p:cNvPr id="101" name="Bottom Strip"/>
+          <p:cNvSpPr/>
+          <p:nvPr/>
+        </p:nvSpPr>
+        <p:spPr>
+          <a:xfrm>
+            <a:off x="0" y="6515100"/>
+            <a:ext cx="12191695" cy="342900"/>
+          </a:xfrm>
+          <a:prstGeom prst="rect">
+            <a:avLst/>
+          </a:prstGeom>
+          <a:solidFill>
+            <a:schemeClr val="accent1"/>
+          </a:solidFill>
+          <a:ln>
+            <a:noFill/>
+          </a:ln>
+        </p:spPr>
+      </p:sp>
+      <p:sp>
+        <p:nvSpPr>
+          <p:cNvPr id="102" name="Accent Circle 1"/>
+          <p:cNvSpPr/>
+          <p:nvPr/>
+        </p:nvSpPr>
+        <p:spPr>
+          <a:xfrm>
+            <a:off x="11291695" y="6158000"/>
+            <a:ext cx="250000" cy="250000"/>
+          </a:xfrm>
+          <a:prstGeom prst="ellipse">
+            <a:avLst/>
+          </a:prstGeom>
+          <a:solidFill>
+            <a:schemeClr val="accent2"/>
+          </a:solidFill>
+          <a:ln>
+            <a:noFill/>
+          </a:ln>
+        </p:spPr>
+      </p:sp>
+      <p:sp>
+        <p:nvSpPr>
+          <p:cNvPr id="103" name="Accent Circle 2"/>
+          <p:cNvSpPr/>
+          <p:nvPr/>
+        </p:nvSpPr>
+        <p:spPr>
+          <a:xfrm>
+            <a:off x="11591695" y="6308000"/>
+            <a:ext cx="200000" cy="200000"/>
+          </a:xfrm>
+          <a:prstGeom prst="ellipse">
+            <a:avLst/>
+          </a:prstGeom>
+          <a:solidFill>
+            <a:schemeClr val="accent3"/>
+          </a:solidFill>
+          <a:ln>
+            <a:noFill/>
+          </a:ln>
+        </p:spPr>
+      </p:sp>
+      <p:sp>
+        <p:nvSpPr>
           <p:cNvPr id="2" name="Title Placeholder 1"/>
           <p:cNvSpPr>
             <a:spLocks noGrp="1"/>
@@ -2604,7 +2667,7 @@
         <p:spPr>
           <a:xfrm>
             <a:off x="457200" y="274638"/>
-            <a:ext cx="8229600" cy="1143000"/>
+            <a:ext cx="11277295" cy="1143000"/>
           </a:xfrm>
           <a:prstGeom prst="rect">
             <a:avLst/>
@@ -2637,7 +2700,7 @@
         <p:spPr>
           <a:xfrm>
             <a:off x="457200" y="1600200"/>
-            <a:ext cx="8229600" cy="4525963"/>
+            <a:ext cx="11277295" cy="4525963"/>
           </a:xfrm>
           <a:prstGeom prst="rect">
             <a:avLst/>
@@ -2699,7 +2762,7 @@
         <p:spPr>
           <a:xfrm>
             <a:off x="457200" y="6356350"/>
-            <a:ext cx="2133600" cy="365125"/>
+            <a:ext cx="3425898" cy="365125"/>
           </a:xfrm>
           <a:prstGeom prst="rect">
             <a:avLst/>
@@ -2739,8 +2802,8 @@
         </p:nvSpPr>
         <p:spPr>
           <a:xfrm>
-            <a:off x="3124200" y="6356350"/>
-            <a:ext cx="2895600" cy="365125"/>
+            <a:off x="3883098" y="6356350"/>
+            <a:ext cx="3425898" cy="365125"/>
           </a:xfrm>
           <a:prstGeom prst="rect">
             <a:avLst/>
@@ -2776,8 +2839,8 @@
         </p:nvSpPr>
         <p:spPr>
           <a:xfrm>
-            <a:off x="6553200" y="6356350"/>
-            <a:ext cx="2133600" cy="365125"/>
+            <a:off x="7308996" y="6356350"/>
+            <a:ext cx="3425898" cy="365125"/>
           </a:xfrm>
           <a:prstGeom prst="rect">
             <a:avLst/>
